--- a/slides/pptx/week18.pptx
+++ b/slides/pptx/week18.pptx
@@ -682,7 +682,8 @@
           <a:p>
             <a:r>
               <a:rPr lang="en-US" dirty="0"/>
-              <a:t>BOLA/API is the one people under-revise — it's 20 of 100 points across three sections, not a single "spot the vuln" line. The recall-vs-design 50/50 split and the explicit contrast with Week 8 (no payloads here) are the two framing points worth saying out loud. Show briefly; exam day — don't teach.</a:t>
+              <a:t>BOLA/API is the one people under-revise — it's 20 of 100 points across three sections, not a single "spot the vuln" line. The recall-vs-design 50/50 split and the explicit contrast with Week 8 (no payloads here) are the two framing points worth saying out loud. Show briefly; exam day — don't teach.
+Diagram: A thin foundation band (Weeks 1-6, lighter weight) plus a wide emphasis band (Weeks 10-15, most of the exam weight: BOLA/mass-assignment/rate-limits, memory safety, SLSA/SBOM/Cosign, cloud IAM, prompt injection, DevSecOps gates) — Week 16 capstone isn't examinable. Section A (30, modern-stack concepts) and B (20, spot-the-vuln) test recall; C (30, applied design, no payload required) and D (20, pipeline/incident design) test design reasoning — 50/50. Unlike Week 8's midterm, which devoted 30 points to writing an actual SQL injection payload, Week 18 requires zero points of payload-writing: the shift is from writing exploits to designing fixes.</a:t>
             </a:r>
             <a:endParaRPr lang="en-US" dirty="0"/>
           </a:p>
@@ -1233,7 +1234,7 @@
       </p:grpSpPr>
       <p:pic>
         <p:nvPicPr>
-          <p:cNvPr id="2" name="Image 0" descr="/Users/pop7/Library/CloudStorage/OneDrive-MonsterConnectCo.,Ltd/Lecture/KOSEN69 - software-security/slides/pptx/assets/logo-small.png">    </p:cNvPr>
+          <p:cNvPr id="2" name="Image 0" descr="/private/tmp/claude-501/-Users-pop7-Library-CloudStorage-OneDrive-MonsterConnectCo--Ltd-Lecture-KOSEN69---software-security/e6d6556f-17de-403d-a9a0-cf2f846149b4/scratchpad/tree/slides/pptx/assets/logo-small.png">    </p:cNvPr>
           <p:cNvPicPr>
             <a:picLocks noChangeAspect="1"/>
           </p:cNvPicPr>
@@ -1654,7 +1655,7 @@
       </p:sp>
       <p:pic>
         <p:nvPicPr>
-          <p:cNvPr id="8" name="Image 1" descr="/Users/pop7/Library/CloudStorage/OneDrive-MonsterConnectCo.,Ltd/Lecture/KOSEN69 - software-security/slides/pptx/assets/logo-small.png">    </p:cNvPr>
+          <p:cNvPr id="8" name="Image 1" descr="/private/tmp/claude-501/-Users-pop7-Library-CloudStorage-OneDrive-MonsterConnectCo--Ltd-Lecture-KOSEN69---software-security/e6d6556f-17de-403d-a9a0-cf2f846149b4/scratchpad/tree/slides/pptx/assets/logo-small.png">    </p:cNvPr>
           <p:cNvPicPr>
             <a:picLocks noChangeAspect="1"/>
           </p:cNvPicPr>
@@ -1798,50 +1799,33 @@
           </a:p>
         </p:txBody>
       </p:sp>
-      <p:sp>
-        <p:nvSpPr>
-          <p:cNvPr id="5" name="Text 2"/>
-          <p:cNvSpPr/>
+      <p:pic>
+        <p:nvPicPr>
+          <p:cNvPr id="5" name="Image 1" descr="A thin foundation band (Weeks 1-6, lighter weight) plus a wide emphasis band (Weeks 10-15, most of the exam weight: BOLA/mass-assignment/rate-limits, memory safety, SLSA/SBOM/Cosign, cloud IAM, prompt injection, DevSecOps gates) — Week 16 capstone isn't examinable. Section A (30, modern-stack concepts) and B (20, spot-the-vuln) test recall; C (30, applied design, no payload required) and D (20, pipeline/incident design) test design reasoning — 50/50. Unlike Week 8's midterm, which devoted 30 points to writing an actual SQL injection payload, Week 18 requires zero points of payload-writing: the shift is from writing exploits to designing fixes.">    </p:cNvPr>
+          <p:cNvPicPr>
+            <a:picLocks noChangeAspect="1"/>
+          </p:cNvPicPr>
           <p:nvPr/>
-        </p:nvSpPr>
-        <p:spPr>
-          <a:xfrm>
-            <a:off x="548640" y="1325880"/>
-            <a:ext cx="8046720" cy="2468880"/>
-          </a:xfrm>
-          <a:prstGeom prst="rect">
-            <a:avLst/>
-          </a:prstGeom>
-          <a:noFill/>
-          <a:ln/>
-        </p:spPr>
-        <p:txBody>
-          <a:bodyPr wrap="square" lIns="0" tIns="0" rIns="0" bIns="0" rtlCol="0" anchor="t">
-            <a:normAutofit/>
-          </a:bodyPr>
-          <a:lstStyle/>
-          <a:p>
-            <a:pPr indent="0" marL="0">
-              <a:buNone/>
-            </a:pPr>
-            <a:r>
-              <a:rPr lang="en-US" sz="1400" dirty="0">
-                <a:solidFill>
-                  <a:srgbClr val="1F2937"/>
-                </a:solidFill>
-                <a:latin typeface="Calibri" pitchFamily="34" charset="0"/>
-                <a:ea typeface="Calibri" pitchFamily="34" charset="-122"/>
-                <a:cs typeface="Calibri" pitchFamily="34" charset="-120"/>
-              </a:rPr>
-              <a:t>See diagram: A thin foundation band (Weeks 1-6, lighter weight) plus a wide emphasis band (Weeks 10-15, most of the exam weight: BOLA/mass-assignment/rate-limits, memory safety, SLSA/SBOM/Cosign, cloud IAM, prompt injection, DevSecOps gates) — Week 16 capstone isn't examinable. Section A (30, modern-stack concepts) and B (20, spot-the-vuln) test recall; C (30, applied design, no payload required) and D (20, pipeline/incident design) test design reasoning — 50/50. Unlike Week 8's midterm, which devoted 30 points to writing an actual SQL injection payload, Week 18 requires zero points of payload-writing: the shift is from writing exploits to designing fixes. (web only)</a:t>
-            </a:r>
-            <a:endParaRPr lang="en-US" sz="1400" dirty="0"/>
-          </a:p>
-        </p:txBody>
-      </p:sp>
-      <p:sp>
-        <p:nvSpPr>
-          <p:cNvPr id="6" name="Text 3"/>
+        </p:nvPicPr>
+        <p:blipFill>
+          <a:blip r:embed="rId2"/>
+          <a:stretch>
+            <a:fillRect/>
+          </a:stretch>
+        </p:blipFill>
+        <p:spPr>
+          <a:xfrm>
+            <a:off x="2237362" y="1097280"/>
+            <a:ext cx="4669277" cy="3566160"/>
+          </a:xfrm>
+          <a:prstGeom prst="rect">
+            <a:avLst/>
+          </a:prstGeom>
+        </p:spPr>
+      </p:pic>
+      <p:sp>
+        <p:nvSpPr>
+          <p:cNvPr id="6" name="Text 2"/>
           <p:cNvSpPr/>
           <p:nvPr/>
         </p:nvSpPr>
@@ -1880,14 +1864,14 @@
       </p:sp>
       <p:pic>
         <p:nvPicPr>
-          <p:cNvPr id="7" name="Image 1" descr="/Users/pop7/Library/CloudStorage/OneDrive-MonsterConnectCo.,Ltd/Lecture/KOSEN69 - software-security/slides/pptx/assets/logo-small.png">    </p:cNvPr>
+          <p:cNvPr id="7" name="Image 2" descr="/private/tmp/claude-501/-Users-pop7-Library-CloudStorage-OneDrive-MonsterConnectCo--Ltd-Lecture-KOSEN69---software-security/e6d6556f-17de-403d-a9a0-cf2f846149b4/scratchpad/tree/slides/pptx/assets/logo-small.png">    </p:cNvPr>
           <p:cNvPicPr>
             <a:picLocks noChangeAspect="1"/>
           </p:cNvPicPr>
           <p:nvPr/>
         </p:nvPicPr>
         <p:blipFill>
-          <a:blip r:embed="rId2"/>
+          <a:blip r:embed="rId3"/>
           <a:stretch>
             <a:fillRect/>
           </a:stretch>
@@ -2181,7 +2165,7 @@
       </p:sp>
       <p:pic>
         <p:nvPicPr>
-          <p:cNvPr id="8" name="Image 1" descr="/Users/pop7/Library/CloudStorage/OneDrive-MonsterConnectCo.,Ltd/Lecture/KOSEN69 - software-security/slides/pptx/assets/logo-small.png">    </p:cNvPr>
+          <p:cNvPr id="8" name="Image 1" descr="/private/tmp/claude-501/-Users-pop7-Library-CloudStorage-OneDrive-MonsterConnectCo--Ltd-Lecture-KOSEN69---software-security/e6d6556f-17de-403d-a9a0-cf2f846149b4/scratchpad/tree/slides/pptx/assets/logo-small.png">    </p:cNvPr>
           <p:cNvPicPr>
             <a:picLocks noChangeAspect="1"/>
           </p:cNvPicPr>
@@ -2315,7 +2299,7 @@
       </p:sp>
       <p:pic>
         <p:nvPicPr>
-          <p:cNvPr id="4" name="Image 0" descr="/Users/pop7/Library/CloudStorage/OneDrive-MonsterConnectCo.,Ltd/Lecture/KOSEN69 - software-security/slides/pptx/assets/logo-small.png">    </p:cNvPr>
+          <p:cNvPr id="4" name="Image 0" descr="/private/tmp/claude-501/-Users-pop7-Library-CloudStorage-OneDrive-MonsterConnectCo--Ltd-Lecture-KOSEN69---software-security/e6d6556f-17de-403d-a9a0-cf2f846149b4/scratchpad/tree/slides/pptx/assets/logo-small.png">    </p:cNvPr>
           <p:cNvPicPr>
             <a:picLocks noChangeAspect="1"/>
           </p:cNvPicPr>
